--- a/docs/forumit-2026/slides/oneiro-doklad-2026-10-14.pptx
+++ b/docs/forumit-2026/slides/oneiro-doklad-2026-10-14.pptx
@@ -1410,12 +1410,12 @@
           <a:lstStyle/>
           <a:p>
             <a:r>
-              <a:t>Что даёт память: два числа замера.</a:t>
-            </a:r>
-          </a:p>
-          <a:p>
-            <a:r>
-              <a:t>Кадр: С памятью 0,73, без памяти 0,06 на пятидесяти вопросах; слабое место названо.</a:t>
+              <a:t>Что даёт память: три числа одного замера.</a:t>
+            </a:r>
+          </a:p>
+          <a:p>
+            <a:r>
+              <a:t>Кадр: С памятью 0,74 и 0,76, без памяти 0,08 на пятидесяти вопросах; два хранилища идут вровень, слабое место названо.</a:t>
             </a:r>
           </a:p>
           <a:p>
@@ -1425,7 +1425,7 @@
           </a:p>
           <a:p>
             <a:r>
-              <a:t>Доказательство: ~/.openclaw/bench-memory/runs/s-50-2-report.md (сохранённый прогон: 50 вопросов, судья вынес вердикт 49 клеткам графа и 50 — без памяти); bench/memory/run.py</a:t>
+              <a:t>Доказательство: ~/.openclaw/bench-memory/runs/s-50-8-report.md (свежий прогон на текущем коде: 50 вопросов, cap 100, k 5, руки graph,flat,none, код возврата 0, 149 клеток с вердиктом из 150; ответы kimi-k2.5, вердикты deepseek-v4-pro); bench/memory/run.py</a:t>
             </a:r>
           </a:p>
           <a:p>
@@ -11335,7 +11335,7 @@
                 </a:solidFill>
                 <a:latin typeface="Cambria"/>
               </a:rPr>
-              <a:t>Что даёт память: два числа сохранённого замера</a:t>
+              <a:t>Что даёт память: три числа свежего замера</a:t>
             </a:r>
           </a:p>
         </p:txBody>
@@ -11544,7 +11544,7 @@
         <p:spPr>
           <a:xfrm>
             <a:off x="548640" y="1325880"/>
-            <a:ext cx="5394960" cy="1965960"/>
+            <a:ext cx="3547872" cy="1965960"/>
           </a:xfrm>
           <a:prstGeom prst="roundRect">
             <a:avLst>
@@ -11569,13 +11569,13 @@
               </a:spcAft>
             </a:pPr>
             <a:r>
-              <a:rPr sz="5200" b="1" i="0">
+              <a:rPr sz="4400" b="1" i="0">
                 <a:solidFill>
                   <a:srgbClr val="0F7C86"/>
                 </a:solidFill>
                 <a:latin typeface="Cambria"/>
               </a:rPr>
-              <a:t>0,73</a:t>
+              <a:t>0,74</a:t>
             </a:r>
           </a:p>
           <a:p>
@@ -11585,25 +11585,25 @@
               </a:spcAft>
             </a:pPr>
             <a:r>
-              <a:rPr sz="1450" b="1" i="0">
+              <a:rPr sz="1300" b="1" i="0">
                 <a:solidFill>
                   <a:srgbClr val="0E2438"/>
                 </a:solidFill>
                 <a:latin typeface="Calibri"/>
               </a:rPr>
-              <a:t>верных ответов с памятью</a:t>
+              <a:t>верных ответов с графом</a:t>
             </a:r>
           </a:p>
           <a:p>
             <a:pPr algn="l"/>
             <a:r>
-              <a:rPr sz="1200" b="0" i="0">
+              <a:rPr sz="1100" b="0" i="0">
                 <a:solidFill>
                   <a:srgbClr val="5A6B7B"/>
                 </a:solidFill>
                 <a:latin typeface="Calibri"/>
               </a:rPr>
-              <a:t>память в типизированном графе</a:t>
+              <a:t>память типизированными записями</a:t>
             </a:r>
           </a:p>
         </p:txBody>
@@ -11616,8 +11616,8 @@
         </p:nvSpPr>
         <p:spPr>
           <a:xfrm>
-            <a:off x="6153912" y="1325880"/>
-            <a:ext cx="5394960" cy="1965960"/>
+            <a:off x="4325112" y="1325880"/>
+            <a:ext cx="3547872" cy="1965960"/>
           </a:xfrm>
           <a:prstGeom prst="roundRect">
             <a:avLst>
@@ -11642,13 +11642,13 @@
               </a:spcAft>
             </a:pPr>
             <a:r>
-              <a:rPr sz="5200" b="1" i="0">
+              <a:rPr sz="4400" b="1" i="0">
                 <a:solidFill>
                   <a:srgbClr val="0F7C86"/>
                 </a:solidFill>
                 <a:latin typeface="Cambria"/>
               </a:rPr>
-              <a:t>0,06</a:t>
+              <a:t>0,76</a:t>
             </a:r>
           </a:p>
           <a:p>
@@ -11658,19 +11658,92 @@
               </a:spcAft>
             </a:pPr>
             <a:r>
-              <a:rPr sz="1450" b="1" i="0">
+              <a:rPr sz="1300" b="1" i="0">
                 <a:solidFill>
                   <a:srgbClr val="0E2438"/>
                 </a:solidFill>
                 <a:latin typeface="Calibri"/>
               </a:rPr>
+              <a:t>верных ответов с журналом</a:t>
+            </a:r>
+          </a:p>
+          <a:p>
+            <a:pPr algn="l"/>
+            <a:r>
+              <a:rPr sz="1100" b="0" i="0">
+                <a:solidFill>
+                  <a:srgbClr val="5A6B7B"/>
+                </a:solidFill>
+                <a:latin typeface="Calibri"/>
+              </a:rPr>
+              <a:t>тот же материал одним текстом</a:t>
+            </a:r>
+          </a:p>
+        </p:txBody>
+      </p:sp>
+      <p:sp>
+        <p:nvSpPr>
+          <p:cNvPr id="11" name="Rounded Rectangle 10"/>
+          <p:cNvSpPr/>
+          <p:nvPr/>
+        </p:nvSpPr>
+        <p:spPr>
+          <a:xfrm>
+            <a:off x="8101583" y="1325880"/>
+            <a:ext cx="3547872" cy="1965960"/>
+          </a:xfrm>
+          <a:prstGeom prst="roundRect">
+            <a:avLst>
+              <a:gd name="adj" fmla="val 6000"/>
+            </a:avLst>
+          </a:prstGeom>
+          <a:solidFill>
+            <a:srgbClr val="EDF3F8"/>
+          </a:solidFill>
+          <a:ln>
+            <a:noFill/>
+          </a:ln>
+          <a:effectLst/>
+        </p:spPr>
+        <p:txBody>
+          <a:bodyPr rtlCol="0" anchor="t" wrap="square" lIns="182880" rIns="182880" tIns="128016" bIns="128016"/>
+          <a:lstStyle/>
+          <a:p>
+            <a:pPr algn="l">
+              <a:spcAft>
+                <a:spcPts val="400"/>
+              </a:spcAft>
+            </a:pPr>
+            <a:r>
+              <a:rPr sz="4400" b="1" i="0">
+                <a:solidFill>
+                  <a:srgbClr val="0F7C86"/>
+                </a:solidFill>
+                <a:latin typeface="Cambria"/>
+              </a:rPr>
+              <a:t>0,08</a:t>
+            </a:r>
+          </a:p>
+          <a:p>
+            <a:pPr algn="l">
+              <a:spcAft>
+                <a:spcPts val="400"/>
+              </a:spcAft>
+            </a:pPr>
+            <a:r>
+              <a:rPr sz="1300" b="1" i="0">
+                <a:solidFill>
+                  <a:srgbClr val="0E2438"/>
+                </a:solidFill>
+                <a:latin typeface="Calibri"/>
+              </a:rPr>
               <a:t>верных ответов без памяти</a:t>
             </a:r>
           </a:p>
           <a:p>
             <a:pPr algn="l"/>
             <a:r>
-              <a:rPr sz="1200" b="0" i="0">
+              <a:rPr sz="1100" b="0" i="0">
                 <a:solidFill>
                   <a:srgbClr val="5A6B7B"/>
                 </a:solidFill>
@@ -11683,14 +11756,14 @@
       </p:sp>
       <p:sp>
         <p:nvSpPr>
-          <p:cNvPr id="11" name="TextBox 10"/>
+          <p:cNvPr id="12" name="TextBox 11"/>
           <p:cNvSpPr txBox="1"/>
           <p:nvPr/>
         </p:nvSpPr>
         <p:spPr>
           <a:xfrm>
-            <a:off x="548640" y="3429000"/>
-            <a:ext cx="11094415" cy="365760"/>
+            <a:off x="548640" y="3401568"/>
+            <a:ext cx="11094415" cy="457200"/>
           </a:xfrm>
           <a:prstGeom prst="rect">
             <a:avLst/>
@@ -11715,14 +11788,14 @@
                 </a:solidFill>
                 <a:latin typeface="Calibri"/>
               </a:rPr>
-              <a:t>LongMemEval, 50 вопросов, сохранённый прогон; верных ответов — доля клеток, которым судья вынес вердикт.</a:t>
-            </a:r>
-          </a:p>
-        </p:txBody>
-      </p:sp>
-      <p:sp>
-        <p:nvSpPr>
-          <p:cNvPr id="12" name="Rounded Rectangle 11"/>
+              <a:t>LongMemEval, 50 вопросов, свежий прогон на текущем коде; верных ответов — доля клеток, которым судья вынес вердикт. Два хранилища идут вровень, а разница с памятью и без неё — сорокакратная.</a:t>
+            </a:r>
+          </a:p>
+        </p:txBody>
+      </p:sp>
+      <p:sp>
+        <p:nvSpPr>
+          <p:cNvPr id="13" name="Rounded Rectangle 12"/>
           <p:cNvSpPr/>
           <p:nvPr/>
         </p:nvSpPr>
@@ -11756,13 +11829,13 @@
               </a:spcAft>
             </a:pPr>
             <a:r>
-              <a:rPr sz="1350" b="1" i="0">
+              <a:rPr sz="1300" b="1" i="0">
                 <a:solidFill>
                   <a:srgbClr val="0E2438"/>
                 </a:solidFill>
                 <a:latin typeface="Calibri"/>
               </a:rPr>
-              <a:t>Слабое место — вопросы про время</a:t>
+              <a:t>Слабее всего — вопросы про предпочтения</a:t>
             </a:r>
           </a:p>
           <a:p>
@@ -11772,20 +11845,20 @@
               </a:lnSpc>
             </a:pPr>
             <a:r>
-              <a:rPr sz="1200" b="0" i="0">
+              <a:rPr sz="1150" b="0" i="0">
                 <a:solidFill>
                   <a:srgbClr val="5A6B7B"/>
                 </a:solidFill>
                 <a:latin typeface="Calibri"/>
               </a:rPr>
-              <a:t>Они даются хуже остальных. Это ограничение, а не победа.</a:t>
-            </a:r>
-          </a:p>
-        </p:txBody>
-      </p:sp>
-      <p:sp>
-        <p:nvSpPr>
-          <p:cNvPr id="13" name="Rounded Rectangle 12"/>
+              <a:t>Полнота попадания 0,50 против 0,86 и 0,88 в целом; вопросы про время тоже ниже общего счёта. Это ограничение, а не победа.</a:t>
+            </a:r>
+          </a:p>
+        </p:txBody>
+      </p:sp>
+      <p:sp>
+        <p:nvSpPr>
+          <p:cNvPr id="14" name="Rounded Rectangle 13"/>
           <p:cNvSpPr/>
           <p:nvPr/>
         </p:nvSpPr>
@@ -11819,7 +11892,7 @@
               </a:spcAft>
             </a:pPr>
             <a:r>
-              <a:rPr sz="1350" b="1" i="0">
+              <a:rPr sz="1300" b="1" i="0">
                 <a:solidFill>
                   <a:srgbClr val="0E2438"/>
                 </a:solidFill>
@@ -11835,20 +11908,20 @@
               </a:lnSpc>
             </a:pPr>
             <a:r>
-              <a:rPr sz="1200" b="0" i="0">
+              <a:rPr sz="1150" b="0" i="0">
                 <a:solidFill>
                   <a:srgbClr val="5A6B7B"/>
                 </a:solidFill>
                 <a:latin typeface="Calibri"/>
               </a:rPr>
-              <a:t>Поиск «по смыслу» — цель, а не сделанное.</a:t>
-            </a:r>
-          </a:p>
-        </p:txBody>
-      </p:sp>
-      <p:sp>
-        <p:nvSpPr>
-          <p:cNvPr id="14" name="TextBox 13"/>
+              <a:t>Поиск «по смыслу» — цель, а не сделанное. Одна клетка из ста пятидесяти осталась без вердикта: провайдер отказал, и она названа.</a:t>
+            </a:r>
+          </a:p>
+        </p:txBody>
+      </p:sp>
+      <p:sp>
+        <p:nvSpPr>
+          <p:cNvPr id="15" name="TextBox 14"/>
           <p:cNvSpPr txBox="1"/>
           <p:nvPr/>
         </p:nvSpPr>
@@ -11876,14 +11949,14 @@
                 </a:solidFill>
                 <a:latin typeface="Calibri"/>
               </a:rPr>
-              <a:t>~/.openclaw/bench-memory/runs/s-50-2-report.md (сохранённый прогон) · bench/memory/run.py</a:t>
-            </a:r>
-          </a:p>
-        </p:txBody>
-      </p:sp>
-      <p:sp>
-        <p:nvSpPr>
-          <p:cNvPr id="15" name="TextBox 14"/>
+              <a:t>~/.openclaw/bench-memory/runs/s-50-8-report.md (свежий прогон, 50 вопросов) · bench/memory/run.py</a:t>
+            </a:r>
+          </a:p>
+        </p:txBody>
+      </p:sp>
+      <p:sp>
+        <p:nvSpPr>
+          <p:cNvPr id="16" name="TextBox 15"/>
           <p:cNvSpPr txBox="1"/>
           <p:nvPr/>
         </p:nvSpPr>
